--- a/Host quality simulation.pptx
+++ b/Host quality simulation.pptx
@@ -7,6 +7,7 @@
   <p:sldIdLst>
     <p:sldId id="256" r:id="rId2"/>
     <p:sldId id="257" r:id="rId3"/>
+    <p:sldId id="258" r:id="rId4"/>
   </p:sldIdLst>
   <p:sldSz cx="12192000" cy="6858000"/>
   <p:notesSz cx="6858000" cy="9144000"/>
@@ -105,24 +106,76 @@
       </a:defRPr>
     </a:lvl9pPr>
   </p:defaultTextStyle>
+  <p:extLst>
+    <p:ext uri="{EFAFB233-063F-42B5-8137-9DF3F51BA10A}">
+      <p15:sldGuideLst xmlns:p15="http://schemas.microsoft.com/office/powerpoint/2012/main"/>
+    </p:ext>
+  </p:extLst>
 </p:presentation>
+</file>
+
+<file path=ppt/revisionInfo.xml><?xml version="1.0" encoding="utf-8"?>
+<p1510:revInfo xmlns:a="http://schemas.openxmlformats.org/drawingml/2006/main" xmlns:r="http://schemas.openxmlformats.org/officeDocument/2006/relationships" xmlns:p1510="http://schemas.microsoft.com/office/powerpoint/2015/10/main">
+  <p1510:revLst>
+    <p1510:client id="{E2ADF89F-ACC7-442F-86BA-F996A83CD7F2}" v="1" dt="2026-06-08T07:32:46.727"/>
+  </p1510:revLst>
+</p1510:revInfo>
 </file>
 
 <file path=ppt/changesInfos/changesInfo1.xml><?xml version="1.0" encoding="utf-8"?>
 <pc:chgInfo xmlns:a="http://schemas.openxmlformats.org/drawingml/2006/main" xmlns:r="http://schemas.openxmlformats.org/officeDocument/2006/relationships" xmlns:ac="http://schemas.microsoft.com/office/drawing/2013/main/command" xmlns:pc="http://schemas.microsoft.com/office/powerpoint/2013/main/command">
   <pc:docChgLst>
     <pc:chgData name="Bijman, Loes" userId="7d9a7009-7f99-4743-af68-8704dc242ecf" providerId="ADAL" clId="{8BB45218-41A9-4F13-B276-A95F91337353}"/>
-    <pc:docChg chg="addSld">
-      <pc:chgData name="Bijman, Loes" userId="7d9a7009-7f99-4743-af68-8704dc242ecf" providerId="ADAL" clId="{8BB45218-41A9-4F13-B276-A95F91337353}" dt="2026-06-04T13:05:40.090" v="0" actId="680"/>
+    <pc:docChg chg="custSel addSld modSld">
+      <pc:chgData name="Bijman, Loes" userId="7d9a7009-7f99-4743-af68-8704dc242ecf" providerId="ADAL" clId="{8BB45218-41A9-4F13-B276-A95F91337353}" dt="2026-06-08T12:14:35.813" v="682" actId="20577"/>
       <pc:docMkLst>
         <pc:docMk/>
       </pc:docMkLst>
-      <pc:sldChg chg="new">
-        <pc:chgData name="Bijman, Loes" userId="7d9a7009-7f99-4743-af68-8704dc242ecf" providerId="ADAL" clId="{8BB45218-41A9-4F13-B276-A95F91337353}" dt="2026-06-04T13:05:40.090" v="0" actId="680"/>
+      <pc:sldChg chg="addSp delSp modSp new mod">
+        <pc:chgData name="Bijman, Loes" userId="7d9a7009-7f99-4743-af68-8704dc242ecf" providerId="ADAL" clId="{8BB45218-41A9-4F13-B276-A95F91337353}" dt="2026-06-08T11:56:16.480" v="422" actId="20577"/>
         <pc:sldMkLst>
           <pc:docMk/>
           <pc:sldMk cId="1604913792" sldId="257"/>
         </pc:sldMkLst>
+        <pc:spChg chg="del">
+          <ac:chgData name="Bijman, Loes" userId="7d9a7009-7f99-4743-af68-8704dc242ecf" providerId="ADAL" clId="{8BB45218-41A9-4F13-B276-A95F91337353}" dt="2026-06-08T07:32:29.899" v="1" actId="931"/>
+          <ac:spMkLst>
+            <pc:docMk/>
+            <pc:sldMk cId="1604913792" sldId="257"/>
+            <ac:spMk id="3" creationId="{25A920AB-FDE8-EFDE-9D9B-56699221435A}"/>
+          </ac:spMkLst>
+        </pc:spChg>
+        <pc:spChg chg="add mod">
+          <ac:chgData name="Bijman, Loes" userId="7d9a7009-7f99-4743-af68-8704dc242ecf" providerId="ADAL" clId="{8BB45218-41A9-4F13-B276-A95F91337353}" dt="2026-06-08T11:56:16.480" v="422" actId="20577"/>
+          <ac:spMkLst>
+            <pc:docMk/>
+            <pc:sldMk cId="1604913792" sldId="257"/>
+            <ac:spMk id="6" creationId="{C4072EF1-38B0-5F79-0419-DF1FF420A520}"/>
+          </ac:spMkLst>
+        </pc:spChg>
+        <pc:picChg chg="add mod ord">
+          <ac:chgData name="Bijman, Loes" userId="7d9a7009-7f99-4743-af68-8704dc242ecf" providerId="ADAL" clId="{8BB45218-41A9-4F13-B276-A95F91337353}" dt="2026-06-08T07:32:42.437" v="4" actId="1076"/>
+          <ac:picMkLst>
+            <pc:docMk/>
+            <pc:sldMk cId="1604913792" sldId="257"/>
+            <ac:picMk id="5" creationId="{F0BB90CB-2BDF-EEEA-EF80-1B2E10961981}"/>
+          </ac:picMkLst>
+        </pc:picChg>
+      </pc:sldChg>
+      <pc:sldChg chg="modSp new mod">
+        <pc:chgData name="Bijman, Loes" userId="7d9a7009-7f99-4743-af68-8704dc242ecf" providerId="ADAL" clId="{8BB45218-41A9-4F13-B276-A95F91337353}" dt="2026-06-08T12:14:35.813" v="682" actId="20577"/>
+        <pc:sldMkLst>
+          <pc:docMk/>
+          <pc:sldMk cId="892408440" sldId="258"/>
+        </pc:sldMkLst>
+        <pc:spChg chg="mod">
+          <ac:chgData name="Bijman, Loes" userId="7d9a7009-7f99-4743-af68-8704dc242ecf" providerId="ADAL" clId="{8BB45218-41A9-4F13-B276-A95F91337353}" dt="2026-06-08T12:14:35.813" v="682" actId="20577"/>
+          <ac:spMkLst>
+            <pc:docMk/>
+            <pc:sldMk cId="892408440" sldId="258"/>
+            <ac:spMk id="3" creationId="{17541026-2B96-9FEE-282C-CA97958E372A}"/>
+          </ac:spMkLst>
+        </pc:spChg>
       </pc:sldChg>
     </pc:docChg>
   </pc:docChgLst>
@@ -278,7 +331,7 @@
           <a:p>
             <a:fld id="{61607450-80B4-4836-AA86-37152C76973B}" type="datetimeFigureOut">
               <a:rPr lang="en-NL" smtClean="0"/>
-              <a:t>04/06/2026</a:t>
+              <a:t>08/06/2026</a:t>
             </a:fld>
             <a:endParaRPr lang="en-NL"/>
           </a:p>
@@ -478,7 +531,7 @@
           <a:p>
             <a:fld id="{61607450-80B4-4836-AA86-37152C76973B}" type="datetimeFigureOut">
               <a:rPr lang="en-NL" smtClean="0"/>
-              <a:t>04/06/2026</a:t>
+              <a:t>08/06/2026</a:t>
             </a:fld>
             <a:endParaRPr lang="en-NL"/>
           </a:p>
@@ -688,7 +741,7 @@
           <a:p>
             <a:fld id="{61607450-80B4-4836-AA86-37152C76973B}" type="datetimeFigureOut">
               <a:rPr lang="en-NL" smtClean="0"/>
-              <a:t>04/06/2026</a:t>
+              <a:t>08/06/2026</a:t>
             </a:fld>
             <a:endParaRPr lang="en-NL"/>
           </a:p>
@@ -888,7 +941,7 @@
           <a:p>
             <a:fld id="{61607450-80B4-4836-AA86-37152C76973B}" type="datetimeFigureOut">
               <a:rPr lang="en-NL" smtClean="0"/>
-              <a:t>04/06/2026</a:t>
+              <a:t>08/06/2026</a:t>
             </a:fld>
             <a:endParaRPr lang="en-NL"/>
           </a:p>
@@ -1164,7 +1217,7 @@
           <a:p>
             <a:fld id="{61607450-80B4-4836-AA86-37152C76973B}" type="datetimeFigureOut">
               <a:rPr lang="en-NL" smtClean="0"/>
-              <a:t>04/06/2026</a:t>
+              <a:t>08/06/2026</a:t>
             </a:fld>
             <a:endParaRPr lang="en-NL"/>
           </a:p>
@@ -1432,7 +1485,7 @@
           <a:p>
             <a:fld id="{61607450-80B4-4836-AA86-37152C76973B}" type="datetimeFigureOut">
               <a:rPr lang="en-NL" smtClean="0"/>
-              <a:t>04/06/2026</a:t>
+              <a:t>08/06/2026</a:t>
             </a:fld>
             <a:endParaRPr lang="en-NL"/>
           </a:p>
@@ -1847,7 +1900,7 @@
           <a:p>
             <a:fld id="{61607450-80B4-4836-AA86-37152C76973B}" type="datetimeFigureOut">
               <a:rPr lang="en-NL" smtClean="0"/>
-              <a:t>04/06/2026</a:t>
+              <a:t>08/06/2026</a:t>
             </a:fld>
             <a:endParaRPr lang="en-NL"/>
           </a:p>
@@ -1989,7 +2042,7 @@
           <a:p>
             <a:fld id="{61607450-80B4-4836-AA86-37152C76973B}" type="datetimeFigureOut">
               <a:rPr lang="en-NL" smtClean="0"/>
-              <a:t>04/06/2026</a:t>
+              <a:t>08/06/2026</a:t>
             </a:fld>
             <a:endParaRPr lang="en-NL"/>
           </a:p>
@@ -2102,7 +2155,7 @@
           <a:p>
             <a:fld id="{61607450-80B4-4836-AA86-37152C76973B}" type="datetimeFigureOut">
               <a:rPr lang="en-NL" smtClean="0"/>
-              <a:t>04/06/2026</a:t>
+              <a:t>08/06/2026</a:t>
             </a:fld>
             <a:endParaRPr lang="en-NL"/>
           </a:p>
@@ -2415,7 +2468,7 @@
           <a:p>
             <a:fld id="{61607450-80B4-4836-AA86-37152C76973B}" type="datetimeFigureOut">
               <a:rPr lang="en-NL" smtClean="0"/>
-              <a:t>04/06/2026</a:t>
+              <a:t>08/06/2026</a:t>
             </a:fld>
             <a:endParaRPr lang="en-NL"/>
           </a:p>
@@ -2704,7 +2757,7 @@
           <a:p>
             <a:fld id="{61607450-80B4-4836-AA86-37152C76973B}" type="datetimeFigureOut">
               <a:rPr lang="en-NL" smtClean="0"/>
-              <a:t>04/06/2026</a:t>
+              <a:t>08/06/2026</a:t>
             </a:fld>
             <a:endParaRPr lang="en-NL"/>
           </a:p>
@@ -2947,7 +3000,7 @@
           <a:p>
             <a:fld id="{61607450-80B4-4836-AA86-37152C76973B}" type="datetimeFigureOut">
               <a:rPr lang="en-NL" smtClean="0"/>
-              <a:t>04/06/2026</a:t>
+              <a:t>08/06/2026</a:t>
             </a:fld>
             <a:endParaRPr lang="en-NL"/>
           </a:p>
@@ -3473,28 +3526,147 @@
           </a:p>
         </p:txBody>
       </p:sp>
-      <p:sp>
-        <p:nvSpPr>
-          <p:cNvPr id="3" name="Content Placeholder 2">
-            <a:extLst>
-              <a:ext uri="{FF2B5EF4-FFF2-40B4-BE49-F238E27FC236}">
-                <a16:creationId xmlns:a16="http://schemas.microsoft.com/office/drawing/2014/main" id="{25A920AB-FDE8-EFDE-9D9B-56699221435A}"/>
-              </a:ext>
-            </a:extLst>
-          </p:cNvPr>
-          <p:cNvSpPr>
-            <a:spLocks noGrp="1"/>
-          </p:cNvSpPr>
+      <p:pic>
+        <p:nvPicPr>
+          <p:cNvPr id="5" name="Content Placeholder 4">
+            <a:extLst>
+              <a:ext uri="{FF2B5EF4-FFF2-40B4-BE49-F238E27FC236}">
+                <a16:creationId xmlns:a16="http://schemas.microsoft.com/office/drawing/2014/main" id="{F0BB90CB-2BDF-EEEA-EF80-1B2E10961981}"/>
+              </a:ext>
+            </a:extLst>
+          </p:cNvPr>
+          <p:cNvPicPr>
+            <a:picLocks noGrp="1" noChangeAspect="1"/>
+          </p:cNvPicPr>
           <p:nvPr>
             <p:ph idx="1"/>
           </p:nvPr>
-        </p:nvSpPr>
-        <p:spPr/>
-        <p:txBody>
-          <a:bodyPr/>
-          <a:lstStyle/>
-          <a:p>
-            <a:endParaRPr lang="en-NL"/>
+        </p:nvPicPr>
+        <p:blipFill>
+          <a:blip r:embed="rId2">
+            <a:extLst>
+              <a:ext uri="{28A0092B-C50C-407E-A947-70E740481C1C}">
+                <a14:useLocalDpi xmlns:a14="http://schemas.microsoft.com/office/drawing/2010/main" val="0"/>
+              </a:ext>
+            </a:extLst>
+          </a:blip>
+          <a:stretch>
+            <a:fillRect/>
+          </a:stretch>
+        </p:blipFill>
+        <p:spPr>
+          <a:xfrm>
+            <a:off x="838200" y="902081"/>
+            <a:ext cx="7705370" cy="5253166"/>
+          </a:xfrm>
+          <a:prstGeom prst="rect">
+            <a:avLst/>
+          </a:prstGeom>
+        </p:spPr>
+      </p:pic>
+      <p:sp>
+        <p:nvSpPr>
+          <p:cNvPr id="6" name="TextBox 5">
+            <a:extLst>
+              <a:ext uri="{FF2B5EF4-FFF2-40B4-BE49-F238E27FC236}">
+                <a16:creationId xmlns:a16="http://schemas.microsoft.com/office/drawing/2014/main" id="{C4072EF1-38B0-5F79-0419-DF1FF420A520}"/>
+              </a:ext>
+            </a:extLst>
+          </p:cNvPr>
+          <p:cNvSpPr txBox="1"/>
+          <p:nvPr/>
+        </p:nvSpPr>
+        <p:spPr>
+          <a:xfrm>
+            <a:off x="7066788" y="2055763"/>
+            <a:ext cx="4782312" cy="3139321"/>
+          </a:xfrm>
+          <a:prstGeom prst="rect">
+            <a:avLst/>
+          </a:prstGeom>
+          <a:noFill/>
+        </p:spPr>
+        <p:txBody>
+          <a:bodyPr wrap="square" rtlCol="0">
+            <a:spAutoFit/>
+          </a:bodyPr>
+          <a:lstStyle/>
+          <a:p>
+            <a:r>
+              <a:rPr lang="en-US" dirty="0"/>
+              <a:t>Variations in:</a:t>
+            </a:r>
+          </a:p>
+          <a:p>
+            <a:pPr marL="285750" indent="-285750">
+              <a:buFontTx/>
+              <a:buChar char="-"/>
+            </a:pPr>
+            <a:r>
+              <a:rPr lang="en-US" dirty="0"/>
+              <a:t>[exposure]: number of neighboring plants</a:t>
+            </a:r>
+          </a:p>
+          <a:p>
+            <a:pPr marL="742950" lvl="1" indent="-285750">
+              <a:buFontTx/>
+              <a:buChar char="-"/>
+            </a:pPr>
+            <a:r>
+              <a:rPr lang="en-US" dirty="0"/>
+              <a:t>Exposure = encountering the pathogen in your own realm (going to the pub during covid)</a:t>
+            </a:r>
+          </a:p>
+          <a:p>
+            <a:pPr marL="285750" indent="-285750">
+              <a:buFontTx/>
+              <a:buChar char="-"/>
+            </a:pPr>
+            <a:r>
+              <a:rPr lang="en-US" dirty="0"/>
+              <a:t>[establishment]: threshold for disease for each plant</a:t>
+            </a:r>
+          </a:p>
+          <a:p>
+            <a:pPr marL="285750" indent="-285750">
+              <a:buFontTx/>
+              <a:buChar char="-"/>
+            </a:pPr>
+            <a:r>
+              <a:rPr lang="en-US" dirty="0"/>
+              <a:t>[growth]: maximal number of pathogen particles the host spreads, reservoir size</a:t>
+            </a:r>
+          </a:p>
+          <a:p>
+            <a:pPr marL="285750" indent="-285750">
+              <a:buFontTx/>
+              <a:buChar char="-"/>
+            </a:pPr>
+            <a:r>
+              <a:rPr lang="en-US" dirty="0"/>
+              <a:t>[infectivity]: speed at which pathogen can move from plant, </a:t>
+            </a:r>
+            <a:r>
+              <a:rPr lang="en-US" dirty="0" err="1"/>
+              <a:t>hoeveel</a:t>
+            </a:r>
+            <a:r>
+              <a:rPr lang="en-US" dirty="0"/>
+              <a:t> </a:t>
+            </a:r>
+            <a:r>
+              <a:rPr lang="en-US" dirty="0" err="1"/>
+              <a:t>eruit</a:t>
+            </a:r>
+            <a:r>
+              <a:rPr lang="en-US" dirty="0"/>
+              <a:t> </a:t>
+            </a:r>
+            <a:r>
+              <a:rPr lang="en-US" dirty="0" err="1"/>
+              <a:t>gaat</a:t>
+            </a:r>
+            <a:endParaRPr lang="en-NL" dirty="0"/>
           </a:p>
         </p:txBody>
       </p:sp>
@@ -3502,6 +3674,136 @@
     <p:extLst>
       <p:ext uri="{BB962C8B-B14F-4D97-AF65-F5344CB8AC3E}">
         <p14:creationId xmlns:p14="http://schemas.microsoft.com/office/powerpoint/2010/main" val="1604913792"/>
+      </p:ext>
+    </p:extLst>
+  </p:cSld>
+  <p:clrMapOvr>
+    <a:masterClrMapping/>
+  </p:clrMapOvr>
+</p:sld>
+</file>
+
+<file path=ppt/slides/slide3.xml><?xml version="1.0" encoding="utf-8"?>
+<p:sld xmlns:a="http://schemas.openxmlformats.org/drawingml/2006/main" xmlns:r="http://schemas.openxmlformats.org/officeDocument/2006/relationships" xmlns:p="http://schemas.openxmlformats.org/presentationml/2006/main">
+  <p:cSld>
+    <p:spTree>
+      <p:nvGrpSpPr>
+        <p:cNvPr id="1" name=""/>
+        <p:cNvGrpSpPr/>
+        <p:nvPr/>
+      </p:nvGrpSpPr>
+      <p:grpSpPr>
+        <a:xfrm>
+          <a:off x="0" y="0"/>
+          <a:ext cx="0" cy="0"/>
+          <a:chOff x="0" y="0"/>
+          <a:chExt cx="0" cy="0"/>
+        </a:xfrm>
+      </p:grpSpPr>
+      <p:sp>
+        <p:nvSpPr>
+          <p:cNvPr id="2" name="Title 1">
+            <a:extLst>
+              <a:ext uri="{FF2B5EF4-FFF2-40B4-BE49-F238E27FC236}">
+                <a16:creationId xmlns:a16="http://schemas.microsoft.com/office/drawing/2014/main" id="{792ED8B3-005D-CFE7-E328-B5FFC51D4B69}"/>
+              </a:ext>
+            </a:extLst>
+          </p:cNvPr>
+          <p:cNvSpPr>
+            <a:spLocks noGrp="1"/>
+          </p:cNvSpPr>
+          <p:nvPr>
+            <p:ph type="title"/>
+          </p:nvPr>
+        </p:nvSpPr>
+        <p:spPr/>
+        <p:txBody>
+          <a:bodyPr/>
+          <a:lstStyle/>
+          <a:p>
+            <a:endParaRPr lang="en-NL" dirty="0"/>
+          </a:p>
+        </p:txBody>
+      </p:sp>
+      <p:sp>
+        <p:nvSpPr>
+          <p:cNvPr id="3" name="Content Placeholder 2">
+            <a:extLst>
+              <a:ext uri="{FF2B5EF4-FFF2-40B4-BE49-F238E27FC236}">
+                <a16:creationId xmlns:a16="http://schemas.microsoft.com/office/drawing/2014/main" id="{17541026-2B96-9FEE-282C-CA97958E372A}"/>
+              </a:ext>
+            </a:extLst>
+          </p:cNvPr>
+          <p:cNvSpPr>
+            <a:spLocks noGrp="1"/>
+          </p:cNvSpPr>
+          <p:nvPr>
+            <p:ph idx="1"/>
+          </p:nvPr>
+        </p:nvSpPr>
+        <p:spPr/>
+        <p:txBody>
+          <a:bodyPr/>
+          <a:lstStyle/>
+          <a:p>
+            <a:r>
+              <a:rPr lang="en-US" dirty="0"/>
+              <a:t>Read Tara Stewart Merrill papers (&amp; more)</a:t>
+            </a:r>
+          </a:p>
+          <a:p>
+            <a:r>
+              <a:rPr lang="en-US" dirty="0"/>
+              <a:t>Make a short summary for non-</a:t>
+            </a:r>
+            <a:r>
+              <a:rPr lang="en-US" dirty="0" err="1"/>
+              <a:t>modellers</a:t>
+            </a:r>
+            <a:endParaRPr lang="en-US" dirty="0"/>
+          </a:p>
+          <a:p>
+            <a:pPr lvl="1"/>
+            <a:r>
+              <a:rPr lang="en-US" dirty="0"/>
+              <a:t>In host quality context</a:t>
+            </a:r>
+          </a:p>
+          <a:p>
+            <a:r>
+              <a:rPr lang="en-US" dirty="0"/>
+              <a:t>Michelle Hersch has data</a:t>
+            </a:r>
+          </a:p>
+          <a:p>
+            <a:endParaRPr lang="en-US" dirty="0"/>
+          </a:p>
+          <a:p>
+            <a:endParaRPr lang="en-US" dirty="0"/>
+          </a:p>
+          <a:p>
+            <a:r>
+              <a:rPr lang="en-US" dirty="0"/>
+              <a:t>Big DIGDEEP meeting: prepare 15 min presentation</a:t>
+            </a:r>
+          </a:p>
+          <a:p>
+            <a:r>
+              <a:rPr lang="en-US" dirty="0"/>
+              <a:t>Two critical questions </a:t>
+            </a:r>
+            <a:r>
+              <a:rPr lang="en-US"/>
+              <a:t>to address</a:t>
+            </a:r>
+            <a:endParaRPr lang="en-NL" dirty="0"/>
+          </a:p>
+        </p:txBody>
+      </p:sp>
+    </p:spTree>
+    <p:extLst>
+      <p:ext uri="{BB962C8B-B14F-4D97-AF65-F5344CB8AC3E}">
+        <p14:creationId xmlns:p14="http://schemas.microsoft.com/office/powerpoint/2010/main" val="892408440"/>
       </p:ext>
     </p:extLst>
   </p:cSld>
